--- a/public/fun/pack/pptx/reviewpro/보장점검양식프리미엄_31_본인점검_머스터드네이비.pptx
+++ b/public/fun/pack/pptx/reviewpro/보장점검양식프리미엄_31_본인점검_머스터드네이비.pptx
@@ -112,12 +112,12 @@
   <p:extLst>
     <p:ext uri="{521415D9-36F7-43E2-AB2F-B90AF26B5E84}">
       <p14:sectionLst xmlns:p14="http://schemas.microsoft.com/office/powerpoint/2010/main">
-        <p14:section name="시작" id="{4DD3B576-875A-44C8-9F6E-7CADBD795AD8}">
+        <p14:section name="시작" id="{F1778E75-DFB6-462D-8F67-5E413A2EA6E7}">
           <p14:sldIdLst>
             <p14:sldId id="256"/>
           </p14:sldIdLst>
         </p14:section>
-        <p14:section name="본문" id="{4D2C8D63-211C-4682-83FF-50EF8EEC320F}">
+        <p14:section name="본문" id="{DBB5B9AF-28C7-4824-9DF0-19A1BB976114}">
           <p14:sldIdLst>
             <p14:sldId id="257"/>
             <p14:sldId id="258"/>
@@ -2915,7 +2915,7 @@
             </a:lvl1pPr>
           </a:lstStyle>
           <a:p>
-            <a:fld id="{22FFBE6F-AF4D-42AB-8D1F-7BCB08975BCD}" type="slidenum">
+            <a:fld id="{FFB66B7B-033A-4849-88B3-B422A77AA535}" type="slidenum">
               <a:rPr lang="en-US"/>
               <a:t>‹#›</a:t>
             </a:fld>
@@ -5026,7 +5026,7 @@
             </a:lvl1pPr>
           </a:lstStyle>
           <a:p>
-            <a:fld id="{C5A32778-CE23-47CA-ABA8-09219C162829}" type="slidenum">
+            <a:fld id="{9CF2B31F-2C72-473D-9AA2-992DF573162F}" type="slidenum">
               <a:rPr lang="en-US"/>
               <a:t>‹#›</a:t>
             </a:fld>
@@ -5779,7 +5779,7 @@
             </a:lvl1pPr>
           </a:lstStyle>
           <a:p>
-            <a:fld id="{D13E5E67-F04A-4CF6-BCE4-EFA2D866A41D}" type="slidenum">
+            <a:fld id="{3B9A480D-8B14-4DF7-90A7-D1C897B84BEE}" type="slidenum">
               <a:rPr lang="en-US"/>
               <a:t>‹#›</a:t>
             </a:fld>
@@ -6727,7 +6727,7 @@
           <a:p>
             <a:r>
               <a:rPr lang="ko-KR"/>
-              <a:t>본인 점검 · 0000. 00. 00</a:t>
+              <a:t>본인 점검 · 날짜 입력</a:t>
             </a:r>
           </a:p>
           <a:p>
@@ -6818,7 +6818,7 @@
           <a:bodyPr/>
           <a:lstStyle/>
           <a:p>
-            <a:fld id="{F4B73ACD-AD9E-4B81-B4A2-017709C62D9D}" type="slidenum">
+            <a:fld id="{4A6763A8-8993-471B-84D4-767D00D23FB1}" type="slidenum">
               <a:rPr lang="en-US"/>
               <a:t>‹#›</a:t>
             </a:fld>
@@ -7334,7 +7334,7 @@
           <a:bodyPr/>
           <a:lstStyle/>
           <a:p>
-            <a:fld id="{F5178B2A-99BD-4F32-94BE-39287E15C56C}" type="slidenum">
+            <a:fld id="{5156CF5A-EA60-4433-B755-A9F5B259DC03}" type="slidenum">
               <a:rPr lang="en-US"/>
               <a:t>‹#›</a:t>
             </a:fld>
@@ -8840,7 +8840,7 @@
           <a:bodyPr/>
           <a:lstStyle/>
           <a:p>
-            <a:fld id="{E866713E-3A5E-4954-8857-481D0865F936}" type="slidenum">
+            <a:fld id="{76533765-1BAE-4EDE-AECA-222F99A2964B}" type="slidenum">
               <a:rPr lang="en-US"/>
               <a:t>‹#›</a:t>
             </a:fld>
@@ -10390,7 +10390,7 @@
           <a:bodyPr/>
           <a:lstStyle/>
           <a:p>
-            <a:fld id="{2D0C062F-02F8-4BB1-AAD6-59974FB7332D}" type="slidenum">
+            <a:fld id="{E1B973CC-88F8-4A29-A25C-795A044D19CD}" type="slidenum">
               <a:rPr lang="en-US"/>
               <a:t>‹#›</a:t>
             </a:fld>
@@ -11384,7 +11384,7 @@
           <a:bodyPr/>
           <a:lstStyle/>
           <a:p>
-            <a:fld id="{B79FC4B9-861E-4270-B5EF-2A650ED92F38}" type="slidenum">
+            <a:fld id="{C886E1D9-EE5B-49CB-B9CF-E7D6E13E8007}" type="slidenum">
               <a:rPr lang="en-US"/>
               <a:t>‹#›</a:t>
             </a:fld>
